--- a/slides/mapreduce/introduction_to_mapreduce/01_MapReduce_Introduction_24_slides.pptx
+++ b/slides/mapreduce/introduction_to_mapreduce/01_MapReduce_Introduction_24_slides.pptx
@@ -2740,7 +2740,7 @@
                 <a:ea typeface="Cambria" pitchFamily="34" charset="-122"/>
                 <a:cs typeface="Cambria" pitchFamily="34" charset="-120"/>
               </a:rPr>
-              <a:t>Introduction to</a:t>
+              <a:t>Introduction to the</a:t>
             </a:r>
             <a:endParaRPr lang="en-US" sz="4200" dirty="0"/>
           </a:p>
@@ -2757,7 +2757,7 @@
                 <a:ea typeface="Cambria" pitchFamily="34" charset="-122"/>
                 <a:cs typeface="Cambria" pitchFamily="34" charset="-120"/>
               </a:rPr>
-              <a:t>the MapReduce Paradigm</a:t>
+              <a:t>MapReduce Paradigm</a:t>
             </a:r>
             <a:endParaRPr lang="en-US" sz="4200" dirty="0"/>
           </a:p>
@@ -3984,7 +3984,7 @@
         </p:nvSpPr>
         <p:spPr>
           <a:xfrm>
-            <a:off x="0" y="0"/>
+            <a:off x="0" y="201168"/>
             <a:ext cx="9144000" cy="5143500"/>
           </a:xfrm>
           <a:prstGeom prst="rect">
@@ -4021,7 +4021,7 @@
               <a:buNone/>
             </a:pPr>
             <a:r>
-              <a:rPr lang="en-US" sz="2800" b="1" dirty="0">
+              <a:rPr lang="en-US" sz="2400" b="1" dirty="0">
                 <a:solidFill>
                   <a:srgbClr val="1B2A4A"/>
                 </a:solidFill>
@@ -4029,9 +4029,25 @@
                 <a:ea typeface="Cambria" pitchFamily="34" charset="-122"/>
                 <a:cs typeface="Cambria" pitchFamily="34" charset="-120"/>
               </a:rPr>
-              <a:t>Running Example B — Sales Logs: Partitioning &amp; Mapping</a:t>
-            </a:r>
-            <a:endParaRPr lang="en-US" sz="2800" dirty="0"/>
+              <a:t>Running Example B — </a:t>
+            </a:r>
+          </a:p>
+          <a:p>
+            <a:pPr marL="0" indent="0">
+              <a:buNone/>
+            </a:pPr>
+            <a:r>
+              <a:rPr lang="en-US" sz="2400" b="1" dirty="0">
+                <a:solidFill>
+                  <a:srgbClr val="1B2A4A"/>
+                </a:solidFill>
+                <a:latin typeface="Cambria" pitchFamily="34" charset="0"/>
+                <a:ea typeface="Cambria" pitchFamily="34" charset="-122"/>
+                <a:cs typeface="Cambria" pitchFamily="34" charset="-120"/>
+              </a:rPr>
+              <a:t>Sales Logs: Partitioning &amp; Mapping</a:t>
+            </a:r>
+            <a:endParaRPr lang="en-US" sz="2400" dirty="0"/>
           </a:p>
         </p:txBody>
       </p:sp>
@@ -4525,7 +4541,7 @@
         </p:nvSpPr>
         <p:spPr>
           <a:xfrm>
-            <a:off x="2331720" y="2907792"/>
+            <a:off x="2758940" y="2944367"/>
             <a:ext cx="1280160" cy="201168"/>
           </a:xfrm>
           <a:prstGeom prst="rect">
@@ -4564,8 +4580,8 @@
         </p:nvSpPr>
         <p:spPr>
           <a:xfrm>
-            <a:off x="457200" y="3273552"/>
-            <a:ext cx="8229600" cy="987552"/>
+            <a:off x="457200" y="3218687"/>
+            <a:ext cx="8229600" cy="1315837"/>
           </a:xfrm>
           <a:prstGeom prst="roundRect">
             <a:avLst>
@@ -4631,7 +4647,7 @@
         <p:spPr>
           <a:xfrm>
             <a:off x="640080" y="3621024"/>
-            <a:ext cx="7863840" cy="566928"/>
+            <a:ext cx="7863840" cy="804672"/>
           </a:xfrm>
           <a:prstGeom prst="rect">
             <a:avLst/>
@@ -4655,7 +4671,71 @@
                 <a:ea typeface="Courier New" pitchFamily="34" charset="-122"/>
                 <a:cs typeface="Courier New" pitchFamily="34" charset="-120"/>
               </a:rPr>
-              <a:t>("Laptop",1998)  ("Phone",2995)  ("Laptop",999)  ("Tablet",1197)  ("Phone",1198)</a:t>
+              <a:t>("Laptop",1998)  </a:t>
+            </a:r>
+          </a:p>
+          <a:p>
+            <a:pPr marL="0" indent="0">
+              <a:buNone/>
+            </a:pPr>
+            <a:r>
+              <a:rPr lang="en-US" sz="1150" dirty="0">
+                <a:solidFill>
+                  <a:srgbClr val="1B2A4A"/>
+                </a:solidFill>
+                <a:latin typeface="Courier New" pitchFamily="34" charset="0"/>
+                <a:ea typeface="Courier New" pitchFamily="34" charset="-122"/>
+                <a:cs typeface="Courier New" pitchFamily="34" charset="-120"/>
+              </a:rPr>
+              <a:t>("Phone",2995)  </a:t>
+            </a:r>
+          </a:p>
+          <a:p>
+            <a:pPr marL="0" indent="0">
+              <a:buNone/>
+            </a:pPr>
+            <a:r>
+              <a:rPr lang="en-US" sz="1150" dirty="0">
+                <a:solidFill>
+                  <a:srgbClr val="1B2A4A"/>
+                </a:solidFill>
+                <a:latin typeface="Courier New" pitchFamily="34" charset="0"/>
+                <a:ea typeface="Courier New" pitchFamily="34" charset="-122"/>
+                <a:cs typeface="Courier New" pitchFamily="34" charset="-120"/>
+              </a:rPr>
+              <a:t>("Laptop",999)  </a:t>
+            </a:r>
+          </a:p>
+          <a:p>
+            <a:pPr marL="0" indent="0">
+              <a:buNone/>
+            </a:pPr>
+            <a:r>
+              <a:rPr lang="en-US" sz="1150" dirty="0">
+                <a:solidFill>
+                  <a:srgbClr val="1B2A4A"/>
+                </a:solidFill>
+                <a:latin typeface="Courier New" pitchFamily="34" charset="0"/>
+                <a:ea typeface="Courier New" pitchFamily="34" charset="-122"/>
+                <a:cs typeface="Courier New" pitchFamily="34" charset="-120"/>
+              </a:rPr>
+              <a:t>("Tablet",1197)  </a:t>
+            </a:r>
+          </a:p>
+          <a:p>
+            <a:pPr marL="0" indent="0">
+              <a:buNone/>
+            </a:pPr>
+            <a:r>
+              <a:rPr lang="en-US" sz="1150" dirty="0">
+                <a:solidFill>
+                  <a:srgbClr val="1B2A4A"/>
+                </a:solidFill>
+                <a:latin typeface="Courier New" pitchFamily="34" charset="0"/>
+                <a:ea typeface="Courier New" pitchFamily="34" charset="-122"/>
+                <a:cs typeface="Courier New" pitchFamily="34" charset="-120"/>
+              </a:rPr>
+              <a:t>("Phone",1198)</a:t>
             </a:r>
             <a:endParaRPr lang="en-US" sz="1150" dirty="0"/>
           </a:p>
@@ -9012,7 +9092,7 @@
         <p:spPr>
           <a:xfrm>
             <a:off x="4846320" y="960120"/>
-            <a:ext cx="3840480" cy="1600200"/>
+            <a:ext cx="3840480" cy="1481328"/>
           </a:xfrm>
           <a:prstGeom prst="roundRect">
             <a:avLst>
@@ -9209,8 +9289,8 @@
         </p:nvSpPr>
         <p:spPr>
           <a:xfrm>
-            <a:off x="4846320" y="2651760"/>
-            <a:ext cx="3840480" cy="1719072"/>
+            <a:off x="4828032" y="2505456"/>
+            <a:ext cx="3840480" cy="1856232"/>
           </a:xfrm>
           <a:prstGeom prst="roundRect">
             <a:avLst>
@@ -9236,7 +9316,7 @@
         </p:nvSpPr>
         <p:spPr>
           <a:xfrm>
-            <a:off x="5029200" y="2743200"/>
+            <a:off x="5029200" y="2603754"/>
             <a:ext cx="3474720" cy="320040"/>
           </a:xfrm>
           <a:prstGeom prst="rect">
@@ -9275,7 +9355,7 @@
         </p:nvSpPr>
         <p:spPr>
           <a:xfrm>
-            <a:off x="5029200" y="3145536"/>
+            <a:off x="5029200" y="2944368"/>
             <a:ext cx="3474720" cy="347472"/>
           </a:xfrm>
           <a:prstGeom prst="rect">
@@ -9314,8 +9394,8 @@
         </p:nvSpPr>
         <p:spPr>
           <a:xfrm>
-            <a:off x="5029200" y="3529584"/>
-            <a:ext cx="3474720" cy="347472"/>
+            <a:off x="5029200" y="3312414"/>
+            <a:ext cx="3474720" cy="262890"/>
           </a:xfrm>
           <a:prstGeom prst="rect">
             <a:avLst/>
@@ -9353,8 +9433,8 @@
         </p:nvSpPr>
         <p:spPr>
           <a:xfrm>
-            <a:off x="5029200" y="3913632"/>
-            <a:ext cx="3474720" cy="347472"/>
+            <a:off x="5010912" y="3593742"/>
+            <a:ext cx="3474720" cy="283164"/>
           </a:xfrm>
           <a:prstGeom prst="rect">
             <a:avLst/>
@@ -9392,7 +9472,7 @@
         </p:nvSpPr>
         <p:spPr>
           <a:xfrm>
-            <a:off x="5029200" y="4297680"/>
+            <a:off x="4992624" y="3847638"/>
             <a:ext cx="3474720" cy="347472"/>
           </a:xfrm>
           <a:prstGeom prst="rect">
@@ -9431,7 +9511,7 @@
         </p:nvSpPr>
         <p:spPr>
           <a:xfrm>
-            <a:off x="5029200" y="4681728"/>
+            <a:off x="4992624" y="4104663"/>
             <a:ext cx="3474720" cy="347472"/>
           </a:xfrm>
           <a:prstGeom prst="rect">
@@ -11665,7 +11745,7 @@
                 <a:ea typeface="Calibri" pitchFamily="34" charset="-122"/>
                 <a:cs typeface="Calibri" pitchFamily="34" charset="-120"/>
               </a:rPr>
-              <a:t>we can reduce a 10-hour job to minutes — just by using more machines.</a:t>
+              <a:t>we can turn a job that takes hours into one that takes minutes — just by using more machines.</a:t>
             </a:r>
             <a:endParaRPr lang="en-US" dirty="0"/>
           </a:p>
@@ -14790,7 +14870,7 @@
                 <a:ea typeface="Cambria" pitchFamily="34" charset="-122"/>
                 <a:cs typeface="Cambria" pitchFamily="34" charset="-120"/>
               </a:rPr>
-              <a:t>Partition</a:t>
+              <a:t>1. Partition</a:t>
             </a:r>
             <a:endParaRPr lang="en-US" sz="1500" dirty="0"/>
           </a:p>
@@ -15012,7 +15092,7 @@
                 <a:ea typeface="Cambria" pitchFamily="34" charset="-122"/>
                 <a:cs typeface="Cambria" pitchFamily="34" charset="-120"/>
               </a:rPr>
-              <a:t>Map</a:t>
+              <a:t>2. Map</a:t>
             </a:r>
             <a:endParaRPr lang="en-US" sz="1500" dirty="0"/>
           </a:p>
@@ -15234,7 +15314,7 @@
                 <a:ea typeface="Cambria" pitchFamily="34" charset="-122"/>
                 <a:cs typeface="Cambria" pitchFamily="34" charset="-120"/>
               </a:rPr>
-              <a:t>Shuffle</a:t>
+              <a:t>3. Shuffle</a:t>
             </a:r>
             <a:endParaRPr lang="en-US" sz="1500" dirty="0"/>
           </a:p>
@@ -15456,7 +15536,7 @@
                 <a:ea typeface="Cambria" pitchFamily="34" charset="-122"/>
                 <a:cs typeface="Cambria" pitchFamily="34" charset="-120"/>
               </a:rPr>
-              <a:t>Reduce</a:t>
+              <a:t>4. Reduce</a:t>
             </a:r>
             <a:endParaRPr lang="en-US" sz="1500" dirty="0"/>
           </a:p>
@@ -17489,8 +17569,8 @@
         </p:nvSpPr>
         <p:spPr>
           <a:xfrm>
-            <a:off x="1737360" y="1508760"/>
-            <a:ext cx="6949440" cy="594360"/>
+            <a:off x="1737360" y="1508759"/>
+            <a:ext cx="6949440" cy="1159489"/>
           </a:xfrm>
           <a:prstGeom prst="rect">
             <a:avLst/>
@@ -17506,7 +17586,7 @@
               <a:buNone/>
             </a:pPr>
             <a:r>
-              <a:rPr lang="en-US" sz="1500" dirty="0">
+              <a:rPr lang="en-US" sz="2800" dirty="0">
                 <a:solidFill>
                   <a:srgbClr val="CADCFC"/>
                 </a:solidFill>
@@ -17514,9 +17594,25 @@
                 <a:ea typeface="Calibri" pitchFamily="34" charset="-122"/>
                 <a:cs typeface="Calibri" pitchFamily="34" charset="-120"/>
               </a:rPr>
-              <a:t>Breaking a large dataset into independent chunks that can be processed in parallel</a:t>
-            </a:r>
-            <a:endParaRPr lang="en-US" sz="1500" dirty="0"/>
+              <a:t>Breaking a large dataset into independent </a:t>
+            </a:r>
+          </a:p>
+          <a:p>
+            <a:pPr marL="0" indent="0">
+              <a:buNone/>
+            </a:pPr>
+            <a:r>
+              <a:rPr lang="en-US" sz="2800" dirty="0">
+                <a:solidFill>
+                  <a:srgbClr val="CADCFC"/>
+                </a:solidFill>
+                <a:latin typeface="Calibri" pitchFamily="34" charset="0"/>
+                <a:ea typeface="Calibri" pitchFamily="34" charset="-122"/>
+                <a:cs typeface="Calibri" pitchFamily="34" charset="-120"/>
+              </a:rPr>
+              <a:t>chunks  that can be processed in parallel</a:t>
+            </a:r>
+            <a:endParaRPr lang="en-US" sz="2800" dirty="0"/>
           </a:p>
         </p:txBody>
       </p:sp>
@@ -17689,7 +17785,7 @@
                 <a:ea typeface="Calibri" pitchFamily="34" charset="-122"/>
                 <a:cs typeface="Calibri" pitchFamily="34" charset="-120"/>
               </a:rPr>
-              <a:t>A partition is a contiguous, non-overlapping subset of the full dataset assigned to one worker for processing.</a:t>
+              <a:t>A partition is a non-overlapping subset of the full dataset assigned to one worker for processing.</a:t>
             </a:r>
             <a:endParaRPr lang="en-US" sz="1400" dirty="0"/>
           </a:p>
@@ -18698,7 +18794,7 @@
                 <a:ea typeface="Calibri" pitchFamily="34" charset="-122"/>
                 <a:cs typeface="Calibri" pitchFamily="34" charset="-120"/>
               </a:rPr>
-              <a:t>How: Record 0 → P0, Record 1 → P1, …, Record n → Pn mod k</a:t>
+              <a:t>How: Record 0 → P0, Record 1 → P1, …, Record n → P(n mod k)</a:t>
             </a:r>
             <a:endParaRPr lang="en-US" sz="1150" dirty="0"/>
           </a:p>
@@ -19265,7 +19361,7 @@
         </p:nvSpPr>
         <p:spPr>
           <a:xfrm>
-            <a:off x="457200" y="1371600"/>
+            <a:off x="427220" y="1379095"/>
             <a:ext cx="8229600" cy="960120"/>
           </a:xfrm>
           <a:prstGeom prst="roundRect">
@@ -19283,6 +19379,13 @@
             <a:prstDash val="solid"/>
           </a:ln>
         </p:spPr>
+        <p:txBody>
+          <a:bodyPr/>
+          <a:lstStyle/>
+          <a:p>
+            <a:endParaRPr lang="en-US" dirty="0"/>
+          </a:p>
+        </p:txBody>
       </p:sp>
       <p:sp>
         <p:nvSpPr>
@@ -19292,7 +19395,7 @@
         </p:nvSpPr>
         <p:spPr>
           <a:xfrm>
-            <a:off x="640080" y="1444752"/>
+            <a:off x="640080" y="1369951"/>
             <a:ext cx="2743200" cy="256032"/>
           </a:xfrm>
           <a:prstGeom prst="rect">
@@ -19331,8 +19434,8 @@
         </p:nvSpPr>
         <p:spPr>
           <a:xfrm>
-            <a:off x="640080" y="1719072"/>
-            <a:ext cx="7863840" cy="256032"/>
+            <a:off x="427220" y="1719072"/>
+            <a:ext cx="8076700" cy="256032"/>
           </a:xfrm>
           <a:prstGeom prst="rect">
             <a:avLst/>
@@ -19364,92 +19467,14 @@
       </p:sp>
       <p:sp>
         <p:nvSpPr>
-          <p:cNvPr id="9" name="Text 7"/>
-          <p:cNvSpPr/>
-          <p:nvPr/>
-        </p:nvSpPr>
-        <p:spPr>
-          <a:xfrm>
-            <a:off x="640080" y="1719072"/>
-            <a:ext cx="7863840" cy="256032"/>
-          </a:xfrm>
-          <a:prstGeom prst="rect">
-            <a:avLst/>
-          </a:prstGeom>
-          <a:noFill/>
-          <a:ln/>
-        </p:spPr>
-        <p:txBody>
-          <a:bodyPr wrap="square" lIns="0" tIns="0" rIns="0" bIns="0" rtlCol="0" anchor="ctr"/>
-          <a:lstStyle/>
-          <a:p>
-            <a:pPr marL="0" indent="0">
-              <a:buNone/>
-            </a:pPr>
-            <a:r>
-              <a:rPr lang="en-US" sz="1200" dirty="0">
-                <a:solidFill>
-                  <a:srgbClr val="1B2A4A"/>
-                </a:solidFill>
-                <a:latin typeface="Courier New" pitchFamily="34" charset="0"/>
-                <a:ea typeface="Courier New" pitchFamily="34" charset="-122"/>
-                <a:cs typeface="Courier New" pitchFamily="34" charset="-120"/>
-              </a:rPr>
-              <a:t>"the cat sat on the hat"</a:t>
-            </a:r>
-            <a:endParaRPr lang="en-US" sz="1200" dirty="0"/>
-          </a:p>
-        </p:txBody>
-      </p:sp>
-      <p:sp>
-        <p:nvSpPr>
-          <p:cNvPr id="10" name="Text 8"/>
-          <p:cNvSpPr/>
-          <p:nvPr/>
-        </p:nvSpPr>
-        <p:spPr>
-          <a:xfrm>
-            <a:off x="640080" y="1719072"/>
-            <a:ext cx="7863840" cy="256032"/>
-          </a:xfrm>
-          <a:prstGeom prst="rect">
-            <a:avLst/>
-          </a:prstGeom>
-          <a:noFill/>
-          <a:ln/>
-        </p:spPr>
-        <p:txBody>
-          <a:bodyPr wrap="square" lIns="0" tIns="0" rIns="0" bIns="0" rtlCol="0" anchor="ctr"/>
-          <a:lstStyle/>
-          <a:p>
-            <a:pPr marL="0" indent="0">
-              <a:buNone/>
-            </a:pPr>
-            <a:r>
-              <a:rPr lang="en-US" sz="1200" dirty="0">
-                <a:solidFill>
-                  <a:srgbClr val="1B2A4A"/>
-                </a:solidFill>
-                <a:latin typeface="Courier New" pitchFamily="34" charset="0"/>
-                <a:ea typeface="Courier New" pitchFamily="34" charset="-122"/>
-                <a:cs typeface="Courier New" pitchFamily="34" charset="-120"/>
-              </a:rPr>
-              <a:t>"the fat cat sat on the mat"</a:t>
-            </a:r>
-            <a:endParaRPr lang="en-US" sz="1200" dirty="0"/>
-          </a:p>
-        </p:txBody>
-      </p:sp>
-      <p:sp>
-        <p:nvSpPr>
           <p:cNvPr id="11" name="Text 9"/>
           <p:cNvSpPr/>
           <p:nvPr/>
         </p:nvSpPr>
         <p:spPr>
           <a:xfrm>
-            <a:off x="640080" y="1719072"/>
-            <a:ext cx="7863840" cy="566928"/>
+            <a:off x="411480" y="1790575"/>
+            <a:ext cx="7863840" cy="810293"/>
           </a:xfrm>
           <a:prstGeom prst="rect">
             <a:avLst/>
